--- a/3Gen CrossValidators_FinalProject_Slides.pptx
+++ b/3Gen CrossValidators_FinalProject_Slides.pptx
@@ -3576,12 +3576,12 @@
               <a:buNone/>
             </a:pPr>
             <a:r>
-              <a:rPr lang="en-US" sz="4000" b="1" dirty="0">
+              <a:rPr lang="en-US" sz="4000" b="1">
                 <a:solidFill>
                   <a:srgbClr val="FFFFFF"/>
                 </a:solidFill>
               </a:rPr>
-              <a:t>Ticket Routing</a:t>
+              <a:t>Ticket  Routing</a:t>
             </a:r>
             <a:endParaRPr lang="en-US" sz="4000" dirty="0"/>
           </a:p>
